--- a/Quadro_Aulas_Report_2026-07-14.pptx
+++ b/Quadro_Aulas_Report_2026-07-14.pptx
@@ -1038,7 +1038,7 @@
                   <a:srgbClr val="8FA3C0"/>
                 </a:solidFill>
               </a:rPr>
-              <a:t>14 de Julho de 2026 as 08:44</a:t>
+              <a:t>14 de Julho de 2026 as 18:01</a:t>
             </a:r>
             <a:endParaRPr lang="en-US" sz="700" dirty="0"/>
           </a:p>
@@ -2299,7 +2299,7 @@
                   <a:srgbClr val="222222"/>
                 </a:solidFill>
               </a:rPr>
-              <a:t>Est: 432.5h . Real: 592.1h . Rem: 7h</a:t>
+              <a:t>Est: 432.5h . Real: 593.6h . Rem: 5.5h</a:t>
             </a:r>
             <a:endParaRPr lang="en-US" sz="750" dirty="0"/>
           </a:p>
@@ -3634,7 +3634,7 @@
                   <a:srgbClr val="D97706"/>
                 </a:solidFill>
               </a:rPr>
-              <a:t>1347.9h</a:t>
+              <a:t>1349.4h</a:t>
             </a:r>
             <a:endParaRPr lang="en-US" sz="2400" dirty="0"/>
           </a:p>
@@ -3767,7 +3767,7 @@
                   <a:srgbClr val="F87171"/>
                 </a:solidFill>
               </a:rPr>
-              <a:t>119h</a:t>
+              <a:t>117.5h</a:t>
             </a:r>
             <a:endParaRPr lang="en-US" sz="2400" dirty="0"/>
           </a:p>
@@ -3951,7 +3951,7 @@
         <p:spPr>
           <a:xfrm>
             <a:off x="2441448" y="2916936"/>
-            <a:ext cx="8864328" cy="54864"/>
+            <a:ext cx="8874193" cy="54864"/>
           </a:xfrm>
           <a:prstGeom prst="rect">
             <a:avLst/>
@@ -3975,8 +3975,8 @@
         </p:nvSpPr>
         <p:spPr>
           <a:xfrm>
-            <a:off x="11305776" y="2916936"/>
-            <a:ext cx="782592" cy="54864"/>
+            <a:off x="11315641" y="2916936"/>
+            <a:ext cx="772727" cy="54864"/>
           </a:xfrm>
           <a:prstGeom prst="rect">
             <a:avLst/>
@@ -5034,7 +5034,7 @@
                   <a:srgbClr val="D85A30"/>
                 </a:solidFill>
               </a:rPr>
-              <a:t>17.8%</a:t>
+              <a:t>17.7%</a:t>
             </a:r>
             <a:endParaRPr lang="en-US" sz="2200" dirty="0"/>
           </a:p>
@@ -5433,7 +5433,7 @@
                   <a:srgbClr val="1D9E75"/>
                 </a:solidFill>
               </a:rPr>
-              <a:t>82.2%</a:t>
+              <a:t>82.3%</a:t>
             </a:r>
             <a:endParaRPr lang="en-US" sz="2200" dirty="0"/>
           </a:p>
@@ -6722,7 +6722,7 @@
                   <a:srgbClr val="D97706"/>
                 </a:solidFill>
               </a:rPr>
-              <a:t>246.6h · 45 subs finalizadas</a:t>
+              <a:t>248.1h · 45 subs finalizadas</a:t>
             </a:r>
             <a:endParaRPr lang="en-US" sz="950" dirty="0"/>
           </a:p>
@@ -7321,7 +7321,7 @@
                   <a:srgbClr val="DC2626"/>
                 </a:solidFill>
               </a:rPr>
-              <a:t>⚠ 6 fix(s) sem card</a:t>
+              <a:t>⚠ 7 fix(s) sem card</a:t>
             </a:r>
             <a:endParaRPr lang="en-US" sz="750" dirty="0"/>
           </a:p>
@@ -8013,7 +8013,7 @@
                   <a:srgbClr val="DC2626"/>
                 </a:solidFill>
               </a:rPr>
-              <a:t>⚠ 2 fix(s) sem card</a:t>
+              <a:t>⚠ 1 fix(s) sem card</a:t>
             </a:r>
             <a:endParaRPr lang="en-US" sz="750" dirty="0"/>
           </a:p>
